--- a/你是榮耀君王.pptx
+++ b/你是榮耀君王.pptx
@@ -167,10 +167,9 @@
           <a:lstStyle/>
           <a:p>
             <a:r>
-              <a:rPr lang="zh-TW" altLang="en-US" smtClean="0"/>
+              <a:rPr lang="zh-TW" altLang="en-US"/>
               <a:t>按一下以編輯母片標題樣式</a:t>
             </a:r>
-            <a:endParaRPr lang="zh-TW" altLang="en-US"/>
           </a:p>
         </p:txBody>
       </p:sp>
@@ -286,10 +285,9 @@
           </a:lstStyle>
           <a:p>
             <a:r>
-              <a:rPr lang="zh-TW" altLang="en-US" smtClean="0"/>
+              <a:rPr lang="zh-TW" altLang="en-US"/>
               <a:t>按一下以編輯母片副標題樣式</a:t>
             </a:r>
-            <a:endParaRPr lang="zh-TW" altLang="en-US"/>
           </a:p>
         </p:txBody>
       </p:sp>
@@ -311,7 +309,7 @@
             <a:fld id="{3D983055-2D7F-4D17-BC59-DFB38579382F}" type="datetimeFigureOut">
               <a:rPr lang="en-US" smtClean="0"/>
               <a:pPr/>
-              <a:t>4/9/2022</a:t>
+              <a:t>3/23/2024</a:t>
             </a:fld>
             <a:endParaRPr lang="en-US"/>
           </a:p>
@@ -401,10 +399,9 @@
           <a:lstStyle/>
           <a:p>
             <a:r>
-              <a:rPr lang="zh-TW" altLang="en-US" smtClean="0"/>
+              <a:rPr lang="zh-TW" altLang="en-US"/>
               <a:t>按一下以編輯母片標題樣式</a:t>
             </a:r>
-            <a:endParaRPr lang="zh-TW" altLang="en-US"/>
           </a:p>
         </p:txBody>
       </p:sp>
@@ -425,38 +422,37 @@
           <a:p>
             <a:pPr lvl="0"/>
             <a:r>
-              <a:rPr lang="zh-TW" altLang="en-US" smtClean="0"/>
+              <a:rPr lang="zh-TW" altLang="en-US"/>
               <a:t>按一下以編輯母片文字樣式</a:t>
             </a:r>
           </a:p>
           <a:p>
             <a:pPr lvl="1"/>
             <a:r>
-              <a:rPr lang="zh-TW" altLang="en-US" smtClean="0"/>
+              <a:rPr lang="zh-TW" altLang="en-US"/>
               <a:t>第二層</a:t>
             </a:r>
           </a:p>
           <a:p>
             <a:pPr lvl="2"/>
             <a:r>
-              <a:rPr lang="zh-TW" altLang="en-US" smtClean="0"/>
+              <a:rPr lang="zh-TW" altLang="en-US"/>
               <a:t>第三層</a:t>
             </a:r>
           </a:p>
           <a:p>
             <a:pPr lvl="3"/>
             <a:r>
-              <a:rPr lang="zh-TW" altLang="en-US" smtClean="0"/>
+              <a:rPr lang="zh-TW" altLang="en-US"/>
               <a:t>第四層</a:t>
             </a:r>
           </a:p>
           <a:p>
             <a:pPr lvl="4"/>
             <a:r>
-              <a:rPr lang="zh-TW" altLang="en-US" smtClean="0"/>
+              <a:rPr lang="zh-TW" altLang="en-US"/>
               <a:t>第五層</a:t>
             </a:r>
-            <a:endParaRPr lang="zh-TW" altLang="en-US"/>
           </a:p>
         </p:txBody>
       </p:sp>
@@ -478,7 +474,7 @@
             <a:fld id="{3D983055-2D7F-4D17-BC59-DFB38579382F}" type="datetimeFigureOut">
               <a:rPr lang="en-US" smtClean="0"/>
               <a:pPr/>
-              <a:t>4/9/2022</a:t>
+              <a:t>3/23/2024</a:t>
             </a:fld>
             <a:endParaRPr lang="en-US"/>
           </a:p>
@@ -573,10 +569,9 @@
           <a:lstStyle/>
           <a:p>
             <a:r>
-              <a:rPr lang="zh-TW" altLang="en-US" smtClean="0"/>
+              <a:rPr lang="zh-TW" altLang="en-US"/>
               <a:t>按一下以編輯母片標題樣式</a:t>
             </a:r>
-            <a:endParaRPr lang="zh-TW" altLang="en-US"/>
           </a:p>
         </p:txBody>
       </p:sp>
@@ -602,38 +597,37 @@
           <a:p>
             <a:pPr lvl="0"/>
             <a:r>
-              <a:rPr lang="zh-TW" altLang="en-US" smtClean="0"/>
+              <a:rPr lang="zh-TW" altLang="en-US"/>
               <a:t>按一下以編輯母片文字樣式</a:t>
             </a:r>
           </a:p>
           <a:p>
             <a:pPr lvl="1"/>
             <a:r>
-              <a:rPr lang="zh-TW" altLang="en-US" smtClean="0"/>
+              <a:rPr lang="zh-TW" altLang="en-US"/>
               <a:t>第二層</a:t>
             </a:r>
           </a:p>
           <a:p>
             <a:pPr lvl="2"/>
             <a:r>
-              <a:rPr lang="zh-TW" altLang="en-US" smtClean="0"/>
+              <a:rPr lang="zh-TW" altLang="en-US"/>
               <a:t>第三層</a:t>
             </a:r>
           </a:p>
           <a:p>
             <a:pPr lvl="3"/>
             <a:r>
-              <a:rPr lang="zh-TW" altLang="en-US" smtClean="0"/>
+              <a:rPr lang="zh-TW" altLang="en-US"/>
               <a:t>第四層</a:t>
             </a:r>
           </a:p>
           <a:p>
             <a:pPr lvl="4"/>
             <a:r>
-              <a:rPr lang="zh-TW" altLang="en-US" smtClean="0"/>
+              <a:rPr lang="zh-TW" altLang="en-US"/>
               <a:t>第五層</a:t>
             </a:r>
-            <a:endParaRPr lang="zh-TW" altLang="en-US"/>
           </a:p>
         </p:txBody>
       </p:sp>
@@ -655,7 +649,7 @@
             <a:fld id="{3D983055-2D7F-4D17-BC59-DFB38579382F}" type="datetimeFigureOut">
               <a:rPr lang="en-US" smtClean="0"/>
               <a:pPr/>
-              <a:t>4/9/2022</a:t>
+              <a:t>3/23/2024</a:t>
             </a:fld>
             <a:endParaRPr lang="en-US"/>
           </a:p>
@@ -745,10 +739,9 @@
           <a:lstStyle/>
           <a:p>
             <a:r>
-              <a:rPr lang="zh-TW" altLang="en-US" smtClean="0"/>
+              <a:rPr lang="zh-TW" altLang="en-US"/>
               <a:t>按一下以編輯母片標題樣式</a:t>
             </a:r>
-            <a:endParaRPr lang="zh-TW" altLang="en-US"/>
           </a:p>
         </p:txBody>
       </p:sp>
@@ -769,38 +762,37 @@
           <a:p>
             <a:pPr lvl="0"/>
             <a:r>
-              <a:rPr lang="zh-TW" altLang="en-US" smtClean="0"/>
+              <a:rPr lang="zh-TW" altLang="en-US"/>
               <a:t>按一下以編輯母片文字樣式</a:t>
             </a:r>
           </a:p>
           <a:p>
             <a:pPr lvl="1"/>
             <a:r>
-              <a:rPr lang="zh-TW" altLang="en-US" smtClean="0"/>
+              <a:rPr lang="zh-TW" altLang="en-US"/>
               <a:t>第二層</a:t>
             </a:r>
           </a:p>
           <a:p>
             <a:pPr lvl="2"/>
             <a:r>
-              <a:rPr lang="zh-TW" altLang="en-US" smtClean="0"/>
+              <a:rPr lang="zh-TW" altLang="en-US"/>
               <a:t>第三層</a:t>
             </a:r>
           </a:p>
           <a:p>
             <a:pPr lvl="3"/>
             <a:r>
-              <a:rPr lang="zh-TW" altLang="en-US" smtClean="0"/>
+              <a:rPr lang="zh-TW" altLang="en-US"/>
               <a:t>第四層</a:t>
             </a:r>
           </a:p>
           <a:p>
             <a:pPr lvl="4"/>
             <a:r>
-              <a:rPr lang="zh-TW" altLang="en-US" smtClean="0"/>
+              <a:rPr lang="zh-TW" altLang="en-US"/>
               <a:t>第五層</a:t>
             </a:r>
-            <a:endParaRPr lang="zh-TW" altLang="en-US"/>
           </a:p>
         </p:txBody>
       </p:sp>
@@ -822,7 +814,7 @@
             <a:fld id="{3D983055-2D7F-4D17-BC59-DFB38579382F}" type="datetimeFigureOut">
               <a:rPr lang="en-US" smtClean="0"/>
               <a:pPr/>
-              <a:t>4/9/2022</a:t>
+              <a:t>3/23/2024</a:t>
             </a:fld>
             <a:endParaRPr lang="en-US"/>
           </a:p>
@@ -921,10 +913,9 @@
           </a:lstStyle>
           <a:p>
             <a:r>
-              <a:rPr lang="zh-TW" altLang="en-US" smtClean="0"/>
+              <a:rPr lang="zh-TW" altLang="en-US"/>
               <a:t>按一下以編輯母片標題樣式</a:t>
             </a:r>
-            <a:endParaRPr lang="zh-TW" altLang="en-US"/>
           </a:p>
         </p:txBody>
       </p:sp>
@@ -1041,7 +1032,7 @@
           <a:p>
             <a:pPr lvl="0"/>
             <a:r>
-              <a:rPr lang="zh-TW" altLang="en-US" smtClean="0"/>
+              <a:rPr lang="zh-TW" altLang="en-US"/>
               <a:t>按一下以編輯母片文字樣式</a:t>
             </a:r>
           </a:p>
@@ -1065,7 +1056,7 @@
             <a:fld id="{3D983055-2D7F-4D17-BC59-DFB38579382F}" type="datetimeFigureOut">
               <a:rPr lang="en-US" smtClean="0"/>
               <a:pPr/>
-              <a:t>4/9/2022</a:t>
+              <a:t>3/23/2024</a:t>
             </a:fld>
             <a:endParaRPr lang="en-US"/>
           </a:p>
@@ -1155,10 +1146,9 @@
           <a:lstStyle/>
           <a:p>
             <a:r>
-              <a:rPr lang="zh-TW" altLang="en-US" smtClean="0"/>
+              <a:rPr lang="zh-TW" altLang="en-US"/>
               <a:t>按一下以編輯母片標題樣式</a:t>
             </a:r>
-            <a:endParaRPr lang="zh-TW" altLang="en-US"/>
           </a:p>
         </p:txBody>
       </p:sp>
@@ -1212,38 +1202,37 @@
           <a:p>
             <a:pPr lvl="0"/>
             <a:r>
-              <a:rPr lang="zh-TW" altLang="en-US" smtClean="0"/>
+              <a:rPr lang="zh-TW" altLang="en-US"/>
               <a:t>按一下以編輯母片文字樣式</a:t>
             </a:r>
           </a:p>
           <a:p>
             <a:pPr lvl="1"/>
             <a:r>
-              <a:rPr lang="zh-TW" altLang="en-US" smtClean="0"/>
+              <a:rPr lang="zh-TW" altLang="en-US"/>
               <a:t>第二層</a:t>
             </a:r>
           </a:p>
           <a:p>
             <a:pPr lvl="2"/>
             <a:r>
-              <a:rPr lang="zh-TW" altLang="en-US" smtClean="0"/>
+              <a:rPr lang="zh-TW" altLang="en-US"/>
               <a:t>第三層</a:t>
             </a:r>
           </a:p>
           <a:p>
             <a:pPr lvl="3"/>
             <a:r>
-              <a:rPr lang="zh-TW" altLang="en-US" smtClean="0"/>
+              <a:rPr lang="zh-TW" altLang="en-US"/>
               <a:t>第四層</a:t>
             </a:r>
           </a:p>
           <a:p>
             <a:pPr lvl="4"/>
             <a:r>
-              <a:rPr lang="zh-TW" altLang="en-US" smtClean="0"/>
+              <a:rPr lang="zh-TW" altLang="en-US"/>
               <a:t>第五層</a:t>
             </a:r>
-            <a:endParaRPr lang="zh-TW" altLang="en-US"/>
           </a:p>
         </p:txBody>
       </p:sp>
@@ -1297,38 +1286,37 @@
           <a:p>
             <a:pPr lvl="0"/>
             <a:r>
-              <a:rPr lang="zh-TW" altLang="en-US" smtClean="0"/>
+              <a:rPr lang="zh-TW" altLang="en-US"/>
               <a:t>按一下以編輯母片文字樣式</a:t>
             </a:r>
           </a:p>
           <a:p>
             <a:pPr lvl="1"/>
             <a:r>
-              <a:rPr lang="zh-TW" altLang="en-US" smtClean="0"/>
+              <a:rPr lang="zh-TW" altLang="en-US"/>
               <a:t>第二層</a:t>
             </a:r>
           </a:p>
           <a:p>
             <a:pPr lvl="2"/>
             <a:r>
-              <a:rPr lang="zh-TW" altLang="en-US" smtClean="0"/>
+              <a:rPr lang="zh-TW" altLang="en-US"/>
               <a:t>第三層</a:t>
             </a:r>
           </a:p>
           <a:p>
             <a:pPr lvl="3"/>
             <a:r>
-              <a:rPr lang="zh-TW" altLang="en-US" smtClean="0"/>
+              <a:rPr lang="zh-TW" altLang="en-US"/>
               <a:t>第四層</a:t>
             </a:r>
           </a:p>
           <a:p>
             <a:pPr lvl="4"/>
             <a:r>
-              <a:rPr lang="zh-TW" altLang="en-US" smtClean="0"/>
+              <a:rPr lang="zh-TW" altLang="en-US"/>
               <a:t>第五層</a:t>
             </a:r>
-            <a:endParaRPr lang="zh-TW" altLang="en-US"/>
           </a:p>
         </p:txBody>
       </p:sp>
@@ -1350,7 +1338,7 @@
             <a:fld id="{3D983055-2D7F-4D17-BC59-DFB38579382F}" type="datetimeFigureOut">
               <a:rPr lang="en-US" smtClean="0"/>
               <a:pPr/>
-              <a:t>4/9/2022</a:t>
+              <a:t>3/23/2024</a:t>
             </a:fld>
             <a:endParaRPr lang="en-US"/>
           </a:p>
@@ -1444,10 +1432,9 @@
           </a:lstStyle>
           <a:p>
             <a:r>
-              <a:rPr lang="zh-TW" altLang="en-US" smtClean="0"/>
+              <a:rPr lang="zh-TW" altLang="en-US"/>
               <a:t>按一下以編輯母片標題樣式</a:t>
             </a:r>
-            <a:endParaRPr lang="zh-TW" altLang="en-US"/>
           </a:p>
         </p:txBody>
       </p:sp>
@@ -1510,7 +1497,7 @@
           <a:p>
             <a:pPr lvl="0"/>
             <a:r>
-              <a:rPr lang="zh-TW" altLang="en-US" smtClean="0"/>
+              <a:rPr lang="zh-TW" altLang="en-US"/>
               <a:t>按一下以編輯母片文字樣式</a:t>
             </a:r>
           </a:p>
@@ -1566,38 +1553,37 @@
           <a:p>
             <a:pPr lvl="0"/>
             <a:r>
-              <a:rPr lang="zh-TW" altLang="en-US" smtClean="0"/>
+              <a:rPr lang="zh-TW" altLang="en-US"/>
               <a:t>按一下以編輯母片文字樣式</a:t>
             </a:r>
           </a:p>
           <a:p>
             <a:pPr lvl="1"/>
             <a:r>
-              <a:rPr lang="zh-TW" altLang="en-US" smtClean="0"/>
+              <a:rPr lang="zh-TW" altLang="en-US"/>
               <a:t>第二層</a:t>
             </a:r>
           </a:p>
           <a:p>
             <a:pPr lvl="2"/>
             <a:r>
-              <a:rPr lang="zh-TW" altLang="en-US" smtClean="0"/>
+              <a:rPr lang="zh-TW" altLang="en-US"/>
               <a:t>第三層</a:t>
             </a:r>
           </a:p>
           <a:p>
             <a:pPr lvl="3"/>
             <a:r>
-              <a:rPr lang="zh-TW" altLang="en-US" smtClean="0"/>
+              <a:rPr lang="zh-TW" altLang="en-US"/>
               <a:t>第四層</a:t>
             </a:r>
           </a:p>
           <a:p>
             <a:pPr lvl="4"/>
             <a:r>
-              <a:rPr lang="zh-TW" altLang="en-US" smtClean="0"/>
+              <a:rPr lang="zh-TW" altLang="en-US"/>
               <a:t>第五層</a:t>
             </a:r>
-            <a:endParaRPr lang="zh-TW" altLang="en-US"/>
           </a:p>
         </p:txBody>
       </p:sp>
@@ -1660,7 +1646,7 @@
           <a:p>
             <a:pPr lvl="0"/>
             <a:r>
-              <a:rPr lang="zh-TW" altLang="en-US" smtClean="0"/>
+              <a:rPr lang="zh-TW" altLang="en-US"/>
               <a:t>按一下以編輯母片文字樣式</a:t>
             </a:r>
           </a:p>
@@ -1716,38 +1702,37 @@
           <a:p>
             <a:pPr lvl="0"/>
             <a:r>
-              <a:rPr lang="zh-TW" altLang="en-US" smtClean="0"/>
+              <a:rPr lang="zh-TW" altLang="en-US"/>
               <a:t>按一下以編輯母片文字樣式</a:t>
             </a:r>
           </a:p>
           <a:p>
             <a:pPr lvl="1"/>
             <a:r>
-              <a:rPr lang="zh-TW" altLang="en-US" smtClean="0"/>
+              <a:rPr lang="zh-TW" altLang="en-US"/>
               <a:t>第二層</a:t>
             </a:r>
           </a:p>
           <a:p>
             <a:pPr lvl="2"/>
             <a:r>
-              <a:rPr lang="zh-TW" altLang="en-US" smtClean="0"/>
+              <a:rPr lang="zh-TW" altLang="en-US"/>
               <a:t>第三層</a:t>
             </a:r>
           </a:p>
           <a:p>
             <a:pPr lvl="3"/>
             <a:r>
-              <a:rPr lang="zh-TW" altLang="en-US" smtClean="0"/>
+              <a:rPr lang="zh-TW" altLang="en-US"/>
               <a:t>第四層</a:t>
             </a:r>
           </a:p>
           <a:p>
             <a:pPr lvl="4"/>
             <a:r>
-              <a:rPr lang="zh-TW" altLang="en-US" smtClean="0"/>
+              <a:rPr lang="zh-TW" altLang="en-US"/>
               <a:t>第五層</a:t>
             </a:r>
-            <a:endParaRPr lang="zh-TW" altLang="en-US"/>
           </a:p>
         </p:txBody>
       </p:sp>
@@ -1769,7 +1754,7 @@
             <a:fld id="{3D983055-2D7F-4D17-BC59-DFB38579382F}" type="datetimeFigureOut">
               <a:rPr lang="en-US" smtClean="0"/>
               <a:pPr/>
-              <a:t>4/9/2022</a:t>
+              <a:t>3/23/2024</a:t>
             </a:fld>
             <a:endParaRPr lang="en-US"/>
           </a:p>
@@ -1859,10 +1844,9 @@
           <a:lstStyle/>
           <a:p>
             <a:r>
-              <a:rPr lang="zh-TW" altLang="en-US" smtClean="0"/>
+              <a:rPr lang="zh-TW" altLang="en-US"/>
               <a:t>按一下以編輯母片標題樣式</a:t>
             </a:r>
-            <a:endParaRPr lang="zh-TW" altLang="en-US"/>
           </a:p>
         </p:txBody>
       </p:sp>
@@ -1884,7 +1868,7 @@
             <a:fld id="{3D983055-2D7F-4D17-BC59-DFB38579382F}" type="datetimeFigureOut">
               <a:rPr lang="en-US" smtClean="0"/>
               <a:pPr/>
-              <a:t>4/9/2022</a:t>
+              <a:t>3/23/2024</a:t>
             </a:fld>
             <a:endParaRPr lang="en-US"/>
           </a:p>
@@ -1976,7 +1960,7 @@
             <a:fld id="{3D983055-2D7F-4D17-BC59-DFB38579382F}" type="datetimeFigureOut">
               <a:rPr lang="en-US" smtClean="0"/>
               <a:pPr/>
-              <a:t>4/9/2022</a:t>
+              <a:t>3/23/2024</a:t>
             </a:fld>
             <a:endParaRPr lang="en-US"/>
           </a:p>
@@ -2075,10 +2059,9 @@
           </a:lstStyle>
           <a:p>
             <a:r>
-              <a:rPr lang="zh-TW" altLang="en-US" smtClean="0"/>
+              <a:rPr lang="zh-TW" altLang="en-US"/>
               <a:t>按一下以編輯母片標題樣式</a:t>
             </a:r>
-            <a:endParaRPr lang="zh-TW" altLang="en-US"/>
           </a:p>
         </p:txBody>
       </p:sp>
@@ -2132,38 +2115,37 @@
           <a:p>
             <a:pPr lvl="0"/>
             <a:r>
-              <a:rPr lang="zh-TW" altLang="en-US" smtClean="0"/>
+              <a:rPr lang="zh-TW" altLang="en-US"/>
               <a:t>按一下以編輯母片文字樣式</a:t>
             </a:r>
           </a:p>
           <a:p>
             <a:pPr lvl="1"/>
             <a:r>
-              <a:rPr lang="zh-TW" altLang="en-US" smtClean="0"/>
+              <a:rPr lang="zh-TW" altLang="en-US"/>
               <a:t>第二層</a:t>
             </a:r>
           </a:p>
           <a:p>
             <a:pPr lvl="2"/>
             <a:r>
-              <a:rPr lang="zh-TW" altLang="en-US" smtClean="0"/>
+              <a:rPr lang="zh-TW" altLang="en-US"/>
               <a:t>第三層</a:t>
             </a:r>
           </a:p>
           <a:p>
             <a:pPr lvl="3"/>
             <a:r>
-              <a:rPr lang="zh-TW" altLang="en-US" smtClean="0"/>
+              <a:rPr lang="zh-TW" altLang="en-US"/>
               <a:t>第四層</a:t>
             </a:r>
           </a:p>
           <a:p>
             <a:pPr lvl="4"/>
             <a:r>
-              <a:rPr lang="zh-TW" altLang="en-US" smtClean="0"/>
+              <a:rPr lang="zh-TW" altLang="en-US"/>
               <a:t>第五層</a:t>
             </a:r>
-            <a:endParaRPr lang="zh-TW" altLang="en-US"/>
           </a:p>
         </p:txBody>
       </p:sp>
@@ -2226,7 +2208,7 @@
           <a:p>
             <a:pPr lvl="0"/>
             <a:r>
-              <a:rPr lang="zh-TW" altLang="en-US" smtClean="0"/>
+              <a:rPr lang="zh-TW" altLang="en-US"/>
               <a:t>按一下以編輯母片文字樣式</a:t>
             </a:r>
           </a:p>
@@ -2250,7 +2232,7 @@
             <a:fld id="{3D983055-2D7F-4D17-BC59-DFB38579382F}" type="datetimeFigureOut">
               <a:rPr lang="en-US" smtClean="0"/>
               <a:pPr/>
-              <a:t>4/9/2022</a:t>
+              <a:t>3/23/2024</a:t>
             </a:fld>
             <a:endParaRPr lang="en-US"/>
           </a:p>
@@ -2349,10 +2331,9 @@
           </a:lstStyle>
           <a:p>
             <a:r>
-              <a:rPr lang="zh-TW" altLang="en-US" smtClean="0"/>
+              <a:rPr lang="zh-TW" altLang="en-US"/>
               <a:t>按一下以編輯母片標題樣式</a:t>
             </a:r>
-            <a:endParaRPr lang="zh-TW" altLang="en-US"/>
           </a:p>
         </p:txBody>
       </p:sp>
@@ -2414,10 +2395,9 @@
           </a:lstStyle>
           <a:p>
             <a:r>
-              <a:rPr lang="zh-TW" altLang="en-US" smtClean="0"/>
+              <a:rPr lang="zh-TW" altLang="en-US"/>
               <a:t>按一下圖示以新增圖片</a:t>
             </a:r>
-            <a:endParaRPr lang="zh-TW" altLang="en-US"/>
           </a:p>
         </p:txBody>
       </p:sp>
@@ -2480,7 +2460,7 @@
           <a:p>
             <a:pPr lvl="0"/>
             <a:r>
-              <a:rPr lang="zh-TW" altLang="en-US" smtClean="0"/>
+              <a:rPr lang="zh-TW" altLang="en-US"/>
               <a:t>按一下以編輯母片文字樣式</a:t>
             </a:r>
           </a:p>
@@ -2504,7 +2484,7 @@
             <a:fld id="{3D983055-2D7F-4D17-BC59-DFB38579382F}" type="datetimeFigureOut">
               <a:rPr lang="en-US" smtClean="0"/>
               <a:pPr/>
-              <a:t>4/9/2022</a:t>
+              <a:t>3/23/2024</a:t>
             </a:fld>
             <a:endParaRPr lang="en-US"/>
           </a:p>
@@ -2614,10 +2594,9 @@
           <a:lstStyle/>
           <a:p>
             <a:r>
-              <a:rPr lang="zh-TW" altLang="en-US" smtClean="0"/>
+              <a:rPr lang="zh-TW" altLang="en-US"/>
               <a:t>按一下以編輯母片標題樣式</a:t>
             </a:r>
-            <a:endParaRPr lang="zh-TW" altLang="en-US"/>
           </a:p>
         </p:txBody>
       </p:sp>
@@ -2648,38 +2627,37 @@
           <a:p>
             <a:pPr lvl="0"/>
             <a:r>
-              <a:rPr lang="zh-TW" altLang="en-US" smtClean="0"/>
+              <a:rPr lang="zh-TW" altLang="en-US"/>
               <a:t>按一下以編輯母片文字樣式</a:t>
             </a:r>
           </a:p>
           <a:p>
             <a:pPr lvl="1"/>
             <a:r>
-              <a:rPr lang="zh-TW" altLang="en-US" smtClean="0"/>
+              <a:rPr lang="zh-TW" altLang="en-US"/>
               <a:t>第二層</a:t>
             </a:r>
           </a:p>
           <a:p>
             <a:pPr lvl="2"/>
             <a:r>
-              <a:rPr lang="zh-TW" altLang="en-US" smtClean="0"/>
+              <a:rPr lang="zh-TW" altLang="en-US"/>
               <a:t>第三層</a:t>
             </a:r>
           </a:p>
           <a:p>
             <a:pPr lvl="3"/>
             <a:r>
-              <a:rPr lang="zh-TW" altLang="en-US" smtClean="0"/>
+              <a:rPr lang="zh-TW" altLang="en-US"/>
               <a:t>第四層</a:t>
             </a:r>
           </a:p>
           <a:p>
             <a:pPr lvl="4"/>
             <a:r>
-              <a:rPr lang="zh-TW" altLang="en-US" smtClean="0"/>
+              <a:rPr lang="zh-TW" altLang="en-US"/>
               <a:t>第五層</a:t>
             </a:r>
-            <a:endParaRPr lang="zh-TW" altLang="en-US"/>
           </a:p>
         </p:txBody>
       </p:sp>
@@ -2719,7 +2697,7 @@
             <a:fld id="{3D983055-2D7F-4D17-BC59-DFB38579382F}" type="datetimeFigureOut">
               <a:rPr lang="en-US" smtClean="0"/>
               <a:pPr/>
-              <a:t>4/9/2022</a:t>
+              <a:t>3/23/2024</a:t>
             </a:fld>
             <a:endParaRPr lang="en-US"/>
           </a:p>
@@ -3127,7 +3105,7 @@
                 <a:latin typeface="微軟正黑體" pitchFamily="34" charset="-120"/>
                 <a:ea typeface="微軟正黑體" pitchFamily="34" charset="-120"/>
               </a:rPr>
-              <a:t>袮</a:t>
+              <a:t>祢</a:t>
             </a:r>
             <a:r>
               <a:rPr lang="zh-TW" altLang="en-US" sz="7200" b="1" i="1" dirty="0">
@@ -3212,7 +3190,7 @@
                 <a:latin typeface="微軟正黑體" pitchFamily="34" charset="-120"/>
                 <a:ea typeface="微軟正黑體" pitchFamily="34" charset="-120"/>
               </a:rPr>
-              <a:t>袮</a:t>
+              <a:t>祢</a:t>
             </a:r>
             <a:r>
               <a:rPr lang="zh-TW" altLang="en-US" sz="6400" b="1" dirty="0">
@@ -3244,7 +3222,7 @@
                 <a:latin typeface="微軟正黑體" pitchFamily="34" charset="-120"/>
                 <a:ea typeface="微軟正黑體" pitchFamily="34" charset="-120"/>
               </a:rPr>
-              <a:t>袮</a:t>
+              <a:t>祢</a:t>
             </a:r>
             <a:r>
               <a:rPr lang="zh-TW" altLang="en-US" sz="6400" b="1" dirty="0">
@@ -3275,7 +3253,7 @@
         <p:spPr>
           <a:xfrm>
             <a:off x="0" y="5181600"/>
-            <a:ext cx="12192000" cy="769441"/>
+            <a:ext cx="12192000" cy="646331"/>
           </a:xfrm>
           <a:prstGeom prst="rect">
             <a:avLst/>
@@ -3290,7 +3268,7 @@
           <a:p>
             <a:pPr algn="ctr"/>
             <a:r>
-              <a:rPr lang="en-US" sz="4400" b="1" dirty="0" smtClean="0">
+              <a:rPr lang="en-US" sz="3600" b="1" dirty="0">
                 <a:solidFill>
                   <a:srgbClr val="660033"/>
                 </a:solidFill>
@@ -3301,7 +3279,7 @@
               <a:t>( </a:t>
             </a:r>
             <a:r>
-              <a:rPr lang="zh-CN" altLang="en-US" sz="4400" b="1" dirty="0" smtClean="0">
+              <a:rPr lang="zh-CN" altLang="en-US" sz="3600" b="1" dirty="0">
                 <a:solidFill>
                   <a:srgbClr val="660033"/>
                 </a:solidFill>
@@ -3309,10 +3287,10 @@
                 <a:latin typeface="Microsoft JhengHei" panose="020B0604030504040204" pitchFamily="34" charset="-120"/>
                 <a:ea typeface="Microsoft JhengHei" panose="020B0604030504040204" pitchFamily="34" charset="-120"/>
               </a:rPr>
-              <a:t>正</a:t>
-            </a:r>
-            <a:r>
-              <a:rPr lang="en-US" sz="4400" b="1" dirty="0" smtClean="0">
+              <a:t>正歌</a:t>
+            </a:r>
+            <a:r>
+              <a:rPr lang="en-US" sz="3600" b="1" dirty="0">
                 <a:solidFill>
                   <a:srgbClr val="660033"/>
                 </a:solidFill>
@@ -3322,7 +3300,7 @@
               </a:rPr>
               <a:t> )</a:t>
             </a:r>
-            <a:endParaRPr lang="vi-VN" sz="4400" b="1" dirty="0">
+            <a:endParaRPr lang="vi-VN" sz="3600" b="1" dirty="0">
               <a:solidFill>
                 <a:srgbClr val="660033"/>
               </a:solidFill>
@@ -3395,7 +3373,7 @@
                 <a:latin typeface="微軟正黑體" pitchFamily="34" charset="-120"/>
                 <a:ea typeface="微軟正黑體" pitchFamily="34" charset="-120"/>
               </a:rPr>
-              <a:t>袮</a:t>
+              <a:t>祢</a:t>
             </a:r>
             <a:r>
               <a:rPr lang="zh-TW" altLang="en-US" sz="6400" b="1" dirty="0">
@@ -3437,7 +3415,7 @@
                 <a:latin typeface="微軟正黑體" pitchFamily="34" charset="-120"/>
                 <a:ea typeface="微軟正黑體" pitchFamily="34" charset="-120"/>
               </a:rPr>
-              <a:t>袮</a:t>
+              <a:t>祢</a:t>
             </a:r>
             <a:r>
               <a:rPr lang="zh-TW" altLang="en-US" sz="6400" b="1" dirty="0">
@@ -3468,7 +3446,7 @@
         <p:spPr>
           <a:xfrm>
             <a:off x="0" y="5181600"/>
-            <a:ext cx="12192000" cy="769441"/>
+            <a:ext cx="12192000" cy="646331"/>
           </a:xfrm>
           <a:prstGeom prst="rect">
             <a:avLst/>
@@ -3483,43 +3461,39 @@
           <a:p>
             <a:pPr algn="ctr"/>
             <a:r>
-              <a:rPr lang="en-US" sz="4400" b="1" dirty="0" smtClean="0">
+              <a:rPr lang="en-US" sz="3600" b="1" dirty="0">
                 <a:solidFill>
                   <a:srgbClr val="660033"/>
                 </a:solidFill>
-                <a:effectLst/>
                 <a:latin typeface="Microsoft JhengHei" panose="020B0604030504040204" pitchFamily="34" charset="-120"/>
                 <a:ea typeface="Microsoft JhengHei" panose="020B0604030504040204" pitchFamily="34" charset="-120"/>
               </a:rPr>
               <a:t>( </a:t>
             </a:r>
             <a:r>
-              <a:rPr lang="zh-CN" altLang="en-US" sz="4400" b="1" dirty="0" smtClean="0">
+              <a:rPr lang="zh-CN" altLang="en-US" sz="3600" b="1" dirty="0">
                 <a:solidFill>
                   <a:srgbClr val="660033"/>
                 </a:solidFill>
-                <a:effectLst/>
                 <a:latin typeface="Microsoft JhengHei" panose="020B0604030504040204" pitchFamily="34" charset="-120"/>
                 <a:ea typeface="Microsoft JhengHei" panose="020B0604030504040204" pitchFamily="34" charset="-120"/>
               </a:rPr>
-              <a:t>正</a:t>
-            </a:r>
-            <a:r>
-              <a:rPr lang="en-US" sz="4400" b="1" dirty="0" smtClean="0">
+              <a:t>正歌 </a:t>
+            </a:r>
+            <a:r>
+              <a:rPr lang="en-US" sz="3600" b="1" dirty="0">
                 <a:solidFill>
                   <a:srgbClr val="660033"/>
                 </a:solidFill>
-                <a:effectLst/>
                 <a:latin typeface="Microsoft JhengHei" panose="020B0604030504040204" pitchFamily="34" charset="-120"/>
                 <a:ea typeface="Microsoft JhengHei" panose="020B0604030504040204" pitchFamily="34" charset="-120"/>
               </a:rPr>
-              <a:t> )</a:t>
-            </a:r>
-            <a:endParaRPr lang="vi-VN" sz="4400" b="1" dirty="0">
+              <a:t>)</a:t>
+            </a:r>
+            <a:endParaRPr lang="vi-VN" sz="3600" b="1" dirty="0">
               <a:solidFill>
                 <a:srgbClr val="660033"/>
               </a:solidFill>
-              <a:effectLst/>
               <a:ea typeface="Microsoft JhengHei" panose="020B0604030504040204" pitchFamily="34" charset="-120"/>
             </a:endParaRPr>
           </a:p>
@@ -3598,7 +3572,7 @@
                 <a:latin typeface="微軟正黑體" pitchFamily="34" charset="-120"/>
                 <a:ea typeface="微軟正黑體" pitchFamily="34" charset="-120"/>
               </a:rPr>
-              <a:t>袮</a:t>
+              <a:t>祢</a:t>
             </a:r>
             <a:r>
               <a:rPr lang="zh-TW" altLang="en-US" sz="6400" b="1" dirty="0">
@@ -3640,7 +3614,7 @@
                 <a:latin typeface="微軟正黑體" pitchFamily="34" charset="-120"/>
                 <a:ea typeface="微軟正黑體" pitchFamily="34" charset="-120"/>
               </a:rPr>
-              <a:t>袮</a:t>
+              <a:t>祢</a:t>
             </a:r>
             <a:endParaRPr lang="en-US" altLang="zh-TW" sz="6400" b="1" dirty="0">
               <a:solidFill>
@@ -3661,7 +3635,7 @@
         <p:spPr>
           <a:xfrm>
             <a:off x="0" y="5181600"/>
-            <a:ext cx="12192000" cy="769441"/>
+            <a:ext cx="12192000" cy="646331"/>
           </a:xfrm>
           <a:prstGeom prst="rect">
             <a:avLst/>
@@ -3676,43 +3650,39 @@
           <a:p>
             <a:pPr algn="ctr"/>
             <a:r>
-              <a:rPr lang="en-US" sz="4400" b="1" dirty="0" smtClean="0">
+              <a:rPr lang="en-US" sz="3600" b="1" dirty="0">
                 <a:solidFill>
                   <a:srgbClr val="660033"/>
                 </a:solidFill>
-                <a:effectLst/>
                 <a:latin typeface="Microsoft JhengHei" panose="020B0604030504040204" pitchFamily="34" charset="-120"/>
                 <a:ea typeface="Microsoft JhengHei" panose="020B0604030504040204" pitchFamily="34" charset="-120"/>
               </a:rPr>
               <a:t>( </a:t>
             </a:r>
             <a:r>
-              <a:rPr lang="zh-CN" altLang="en-US" sz="4400" b="1" dirty="0" smtClean="0">
+              <a:rPr lang="zh-CN" altLang="en-US" sz="3600" b="1" dirty="0">
                 <a:solidFill>
                   <a:srgbClr val="660033"/>
                 </a:solidFill>
-                <a:effectLst/>
                 <a:latin typeface="Microsoft JhengHei" panose="020B0604030504040204" pitchFamily="34" charset="-120"/>
                 <a:ea typeface="Microsoft JhengHei" panose="020B0604030504040204" pitchFamily="34" charset="-120"/>
               </a:rPr>
-              <a:t>正</a:t>
-            </a:r>
-            <a:r>
-              <a:rPr lang="en-US" sz="4400" b="1" dirty="0" smtClean="0">
+              <a:t>正歌 </a:t>
+            </a:r>
+            <a:r>
+              <a:rPr lang="en-US" sz="3600" b="1" dirty="0">
                 <a:solidFill>
                   <a:srgbClr val="660033"/>
                 </a:solidFill>
-                <a:effectLst/>
                 <a:latin typeface="Microsoft JhengHei" panose="020B0604030504040204" pitchFamily="34" charset="-120"/>
                 <a:ea typeface="Microsoft JhengHei" panose="020B0604030504040204" pitchFamily="34" charset="-120"/>
               </a:rPr>
-              <a:t> )</a:t>
-            </a:r>
-            <a:endParaRPr lang="vi-VN" sz="4400" b="1" dirty="0">
+              <a:t>)</a:t>
+            </a:r>
+            <a:endParaRPr lang="vi-VN" sz="3600" b="1" dirty="0">
               <a:solidFill>
                 <a:srgbClr val="660033"/>
               </a:solidFill>
-              <a:effectLst/>
               <a:ea typeface="Microsoft JhengHei" panose="020B0604030504040204" pitchFamily="34" charset="-120"/>
             </a:endParaRPr>
           </a:p>
@@ -3791,7 +3761,7 @@
                 <a:latin typeface="微軟正黑體" pitchFamily="34" charset="-120"/>
                 <a:ea typeface="微軟正黑體" pitchFamily="34" charset="-120"/>
               </a:rPr>
-              <a:t>袮</a:t>
+              <a:t>祢</a:t>
             </a:r>
             <a:r>
               <a:rPr lang="zh-TW" altLang="en-US" sz="6400" b="1" dirty="0">
@@ -3823,7 +3793,7 @@
                 <a:latin typeface="微軟正黑體" pitchFamily="34" charset="-120"/>
                 <a:ea typeface="微軟正黑體" pitchFamily="34" charset="-120"/>
               </a:rPr>
-              <a:t>袮</a:t>
+              <a:t>祢</a:t>
             </a:r>
             <a:r>
               <a:rPr lang="zh-TW" altLang="en-US" sz="6400" b="1" dirty="0">
@@ -3854,7 +3824,7 @@
         <p:spPr>
           <a:xfrm>
             <a:off x="0" y="5181600"/>
-            <a:ext cx="12192000" cy="769441"/>
+            <a:ext cx="12192000" cy="646331"/>
           </a:xfrm>
           <a:prstGeom prst="rect">
             <a:avLst/>
@@ -3869,43 +3839,39 @@
           <a:p>
             <a:pPr algn="ctr"/>
             <a:r>
-              <a:rPr lang="en-US" sz="4400" b="1" dirty="0" smtClean="0">
+              <a:rPr lang="en-US" sz="3600" b="1" dirty="0">
                 <a:solidFill>
                   <a:srgbClr val="660033"/>
                 </a:solidFill>
-                <a:effectLst/>
                 <a:latin typeface="Microsoft JhengHei" panose="020B0604030504040204" pitchFamily="34" charset="-120"/>
                 <a:ea typeface="Microsoft JhengHei" panose="020B0604030504040204" pitchFamily="34" charset="-120"/>
               </a:rPr>
               <a:t>( </a:t>
             </a:r>
             <a:r>
-              <a:rPr lang="zh-CN" altLang="en-US" sz="4400" b="1" dirty="0" smtClean="0">
+              <a:rPr lang="zh-CN" altLang="en-US" sz="3600" b="1" dirty="0">
                 <a:solidFill>
                   <a:srgbClr val="660033"/>
                 </a:solidFill>
-                <a:effectLst/>
                 <a:latin typeface="Microsoft JhengHei" panose="020B0604030504040204" pitchFamily="34" charset="-120"/>
                 <a:ea typeface="Microsoft JhengHei" panose="020B0604030504040204" pitchFamily="34" charset="-120"/>
               </a:rPr>
-              <a:t>正</a:t>
-            </a:r>
-            <a:r>
-              <a:rPr lang="en-US" sz="4400" b="1" dirty="0" smtClean="0">
+              <a:t>正歌 </a:t>
+            </a:r>
+            <a:r>
+              <a:rPr lang="en-US" sz="3600" b="1" dirty="0">
                 <a:solidFill>
                   <a:srgbClr val="660033"/>
                 </a:solidFill>
-                <a:effectLst/>
                 <a:latin typeface="Microsoft JhengHei" panose="020B0604030504040204" pitchFamily="34" charset="-120"/>
                 <a:ea typeface="Microsoft JhengHei" panose="020B0604030504040204" pitchFamily="34" charset="-120"/>
               </a:rPr>
-              <a:t> )</a:t>
-            </a:r>
-            <a:endParaRPr lang="vi-VN" sz="4400" b="1" dirty="0">
+              <a:t>)</a:t>
+            </a:r>
+            <a:endParaRPr lang="vi-VN" sz="3600" b="1" dirty="0">
               <a:solidFill>
                 <a:srgbClr val="660033"/>
               </a:solidFill>
-              <a:effectLst/>
               <a:ea typeface="Microsoft JhengHei" panose="020B0604030504040204" pitchFamily="34" charset="-120"/>
             </a:endParaRPr>
           </a:p>
@@ -4017,7 +3983,7 @@
         <p:spPr>
           <a:xfrm>
             <a:off x="0" y="5181600"/>
-            <a:ext cx="12192000" cy="769441"/>
+            <a:ext cx="12192000" cy="646331"/>
           </a:xfrm>
           <a:prstGeom prst="rect">
             <a:avLst/>
@@ -4032,54 +3998,39 @@
           <a:p>
             <a:pPr algn="ctr"/>
             <a:r>
-              <a:rPr lang="en-US" sz="4400" b="1" dirty="0" smtClean="0">
+              <a:rPr lang="en-US" sz="3600" b="1" dirty="0">
                 <a:solidFill>
                   <a:srgbClr val="660033"/>
                 </a:solidFill>
-                <a:effectLst/>
                 <a:latin typeface="Microsoft JhengHei" panose="020B0604030504040204" pitchFamily="34" charset="-120"/>
                 <a:ea typeface="Microsoft JhengHei" panose="020B0604030504040204" pitchFamily="34" charset="-120"/>
               </a:rPr>
               <a:t>( </a:t>
             </a:r>
             <a:r>
-              <a:rPr lang="zh-CN" altLang="en-US" sz="4400" b="1" dirty="0" smtClean="0">
+              <a:rPr lang="zh-CN" altLang="en-US" sz="3600" b="1" dirty="0">
                 <a:solidFill>
                   <a:srgbClr val="660033"/>
                 </a:solidFill>
-                <a:effectLst/>
                 <a:latin typeface="Microsoft JhengHei" panose="020B0604030504040204" pitchFamily="34" charset="-120"/>
                 <a:ea typeface="Microsoft JhengHei" panose="020B0604030504040204" pitchFamily="34" charset="-120"/>
               </a:rPr>
-              <a:t>副</a:t>
-            </a:r>
-            <a:r>
-              <a:rPr lang="en-US" sz="4400" b="1" dirty="0" smtClean="0">
+              <a:t>副歌 </a:t>
+            </a:r>
+            <a:r>
+              <a:rPr lang="en-US" sz="3600" b="1" dirty="0">
                 <a:solidFill>
                   <a:srgbClr val="660033"/>
                 </a:solidFill>
-                <a:effectLst/>
-                <a:latin typeface="Microsoft JhengHei" panose="020B0604030504040204" pitchFamily="34" charset="-120"/>
-                <a:ea typeface="Microsoft JhengHei" panose="020B0604030504040204" pitchFamily="34" charset="-120"/>
-              </a:rPr>
-              <a:t> </a:t>
-            </a:r>
-            <a:r>
-              <a:rPr lang="en-US" sz="4400" b="1" dirty="0" smtClean="0">
-                <a:solidFill>
-                  <a:srgbClr val="660033"/>
-                </a:solidFill>
-                <a:effectLst/>
                 <a:latin typeface="Microsoft JhengHei" panose="020B0604030504040204" pitchFamily="34" charset="-120"/>
                 <a:ea typeface="Microsoft JhengHei" panose="020B0604030504040204" pitchFamily="34" charset="-120"/>
               </a:rPr>
               <a:t>)</a:t>
             </a:r>
-            <a:endParaRPr lang="vi-VN" sz="4400" b="1" dirty="0">
+            <a:endParaRPr lang="vi-VN" sz="3600" b="1" dirty="0">
               <a:solidFill>
                 <a:srgbClr val="660033"/>
               </a:solidFill>
-              <a:effectLst/>
               <a:ea typeface="Microsoft JhengHei" panose="020B0604030504040204" pitchFamily="34" charset="-120"/>
             </a:endParaRPr>
           </a:p>
@@ -4191,7 +4142,7 @@
         <p:spPr>
           <a:xfrm>
             <a:off x="0" y="5181600"/>
-            <a:ext cx="12192000" cy="769441"/>
+            <a:ext cx="12192000" cy="646331"/>
           </a:xfrm>
           <a:prstGeom prst="rect">
             <a:avLst/>
@@ -4206,54 +4157,39 @@
           <a:p>
             <a:pPr algn="ctr"/>
             <a:r>
-              <a:rPr lang="en-US" sz="4400" b="1" dirty="0" smtClean="0">
+              <a:rPr lang="en-US" sz="3600" b="1" dirty="0">
                 <a:solidFill>
                   <a:srgbClr val="660033"/>
                 </a:solidFill>
-                <a:effectLst/>
                 <a:latin typeface="Microsoft JhengHei" panose="020B0604030504040204" pitchFamily="34" charset="-120"/>
                 <a:ea typeface="Microsoft JhengHei" panose="020B0604030504040204" pitchFamily="34" charset="-120"/>
               </a:rPr>
               <a:t>( </a:t>
             </a:r>
             <a:r>
-              <a:rPr lang="zh-CN" altLang="en-US" sz="4400" b="1" dirty="0" smtClean="0">
+              <a:rPr lang="zh-CN" altLang="en-US" sz="3600" b="1" dirty="0">
                 <a:solidFill>
                   <a:srgbClr val="660033"/>
                 </a:solidFill>
-                <a:effectLst/>
                 <a:latin typeface="Microsoft JhengHei" panose="020B0604030504040204" pitchFamily="34" charset="-120"/>
                 <a:ea typeface="Microsoft JhengHei" panose="020B0604030504040204" pitchFamily="34" charset="-120"/>
               </a:rPr>
-              <a:t>副</a:t>
-            </a:r>
-            <a:r>
-              <a:rPr lang="en-US" sz="4400" b="1" dirty="0" smtClean="0">
+              <a:t>副歌 </a:t>
+            </a:r>
+            <a:r>
+              <a:rPr lang="en-US" sz="3600" b="1" dirty="0">
                 <a:solidFill>
                   <a:srgbClr val="660033"/>
                 </a:solidFill>
-                <a:effectLst/>
-                <a:latin typeface="Microsoft JhengHei" panose="020B0604030504040204" pitchFamily="34" charset="-120"/>
-                <a:ea typeface="Microsoft JhengHei" panose="020B0604030504040204" pitchFamily="34" charset="-120"/>
-              </a:rPr>
-              <a:t> </a:t>
-            </a:r>
-            <a:r>
-              <a:rPr lang="en-US" sz="4400" b="1" dirty="0" smtClean="0">
-                <a:solidFill>
-                  <a:srgbClr val="660033"/>
-                </a:solidFill>
-                <a:effectLst/>
                 <a:latin typeface="Microsoft JhengHei" panose="020B0604030504040204" pitchFamily="34" charset="-120"/>
                 <a:ea typeface="Microsoft JhengHei" panose="020B0604030504040204" pitchFamily="34" charset="-120"/>
               </a:rPr>
               <a:t>)</a:t>
             </a:r>
-            <a:endParaRPr lang="vi-VN" sz="4400" b="1" dirty="0">
+            <a:endParaRPr lang="vi-VN" sz="3600" b="1" dirty="0">
               <a:solidFill>
                 <a:srgbClr val="660033"/>
               </a:solidFill>
-              <a:effectLst/>
               <a:ea typeface="Microsoft JhengHei" panose="020B0604030504040204" pitchFamily="34" charset="-120"/>
             </a:endParaRPr>
           </a:p>
